--- a/Thuyết trình bảo vệ đồ án cuối khóa.pptx
+++ b/Thuyết trình bảo vệ đồ án cuối khóa.pptx
@@ -5722,7 +5722,7 @@
               <a:rPr lang="en-US" sz="4400" b="1" dirty="0"/>
             </a:br>
             <a:r>
-              <a:rPr lang="en-US" sz="2800" b="1" dirty="0"/>
+              <a:rPr lang="en-US" sz="3200" b="1" dirty="0"/>
               <a:t>Archer Shooter</a:t>
             </a:r>
           </a:p>
@@ -5758,113 +5758,113 @@
           <a:p>
             <a:pPr algn="l"/>
             <a:r>
-              <a:rPr lang="en-US" sz="3200" dirty="0" err="1"/>
+              <a:rPr lang="en-US" sz="3000" dirty="0" err="1"/>
               <a:t>Họ</a:t>
             </a:r>
             <a:r>
-              <a:rPr lang="en-US" sz="3200" dirty="0"/>
-              <a:t> </a:t>
-            </a:r>
-            <a:r>
-              <a:rPr lang="en-US" sz="3200" dirty="0" err="1"/>
+              <a:rPr lang="en-US" sz="3000" dirty="0"/>
+              <a:t> </a:t>
+            </a:r>
+            <a:r>
+              <a:rPr lang="en-US" sz="3000" dirty="0" err="1"/>
               <a:t>tên</a:t>
             </a:r>
             <a:r>
-              <a:rPr lang="en-US" sz="3200" dirty="0"/>
+              <a:rPr lang="en-US" sz="3000" dirty="0"/>
               <a:t>: </a:t>
             </a:r>
             <a:r>
-              <a:rPr lang="en-US" sz="3200" dirty="0" err="1"/>
+              <a:rPr lang="en-US" sz="3000" dirty="0" err="1"/>
               <a:t>Diệp</a:t>
             </a:r>
             <a:r>
-              <a:rPr lang="en-US" sz="3200" dirty="0"/>
-              <a:t> </a:t>
-            </a:r>
-            <a:r>
-              <a:rPr lang="en-US" sz="3200" dirty="0" err="1"/>
+              <a:rPr lang="en-US" sz="3000" dirty="0"/>
+              <a:t> </a:t>
+            </a:r>
+            <a:r>
+              <a:rPr lang="en-US" sz="3000" dirty="0" err="1"/>
               <a:t>Hiếu</a:t>
             </a:r>
             <a:r>
-              <a:rPr lang="en-US" sz="3200" dirty="0"/>
-              <a:t> </a:t>
-            </a:r>
-            <a:r>
-              <a:rPr lang="en-US" sz="3200" dirty="0" err="1"/>
+              <a:rPr lang="en-US" sz="3000" dirty="0"/>
+              <a:t> </a:t>
+            </a:r>
+            <a:r>
+              <a:rPr lang="en-US" sz="3000" dirty="0" err="1"/>
               <a:t>Nghĩa</a:t>
             </a:r>
-            <a:endParaRPr lang="en-US" sz="3200" dirty="0"/>
+            <a:endParaRPr lang="en-US" sz="3000" dirty="0"/>
           </a:p>
           <a:p>
             <a:pPr algn="l"/>
             <a:r>
-              <a:rPr lang="en-US" sz="3200" dirty="0" err="1"/>
+              <a:rPr lang="en-US" sz="3000" dirty="0" err="1"/>
               <a:t>Lớp</a:t>
             </a:r>
             <a:r>
-              <a:rPr lang="en-US" sz="3200" dirty="0"/>
+              <a:rPr lang="en-US" sz="3000" dirty="0"/>
               <a:t>: CF-CIT 2D002</a:t>
             </a:r>
           </a:p>
           <a:p>
             <a:pPr algn="l"/>
             <a:r>
-              <a:rPr lang="en-US" sz="3200" dirty="0" err="1"/>
+              <a:rPr lang="en-US" sz="3000" dirty="0" err="1"/>
               <a:t>Giảng</a:t>
             </a:r>
             <a:r>
-              <a:rPr lang="en-US" sz="3200" dirty="0"/>
-              <a:t> </a:t>
-            </a:r>
-            <a:r>
-              <a:rPr lang="en-US" sz="3200" dirty="0" err="1"/>
+              <a:rPr lang="en-US" sz="3000" dirty="0"/>
+              <a:t> </a:t>
+            </a:r>
+            <a:r>
+              <a:rPr lang="en-US" sz="3000" dirty="0" err="1"/>
               <a:t>viên</a:t>
             </a:r>
             <a:r>
-              <a:rPr lang="en-US" sz="3200" dirty="0"/>
-              <a:t> </a:t>
-            </a:r>
-            <a:r>
-              <a:rPr lang="en-US" sz="3200" dirty="0" err="1"/>
+              <a:rPr lang="en-US" sz="3000" dirty="0"/>
+              <a:t> </a:t>
+            </a:r>
+            <a:r>
+              <a:rPr lang="en-US" sz="3000" dirty="0" err="1"/>
               <a:t>hướng</a:t>
             </a:r>
             <a:r>
-              <a:rPr lang="en-US" sz="3200" dirty="0"/>
-              <a:t> </a:t>
-            </a:r>
-            <a:r>
-              <a:rPr lang="en-US" sz="3200" dirty="0" err="1"/>
+              <a:rPr lang="en-US" sz="3000" dirty="0"/>
+              <a:t> </a:t>
+            </a:r>
+            <a:r>
+              <a:rPr lang="en-US" sz="3000" dirty="0" err="1"/>
               <a:t>dẫn</a:t>
             </a:r>
             <a:r>
-              <a:rPr lang="en-US" sz="3200" dirty="0"/>
+              <a:rPr lang="en-US" sz="3000" dirty="0"/>
               <a:t>: Phùng </a:t>
             </a:r>
             <a:r>
-              <a:rPr lang="en-US" sz="3200" dirty="0" err="1"/>
+              <a:rPr lang="en-US" sz="3000" dirty="0" err="1"/>
               <a:t>Khắc</a:t>
             </a:r>
             <a:r>
-              <a:rPr lang="en-US" sz="3200" dirty="0"/>
+              <a:rPr lang="en-US" sz="3000" dirty="0"/>
               <a:t> Phương</a:t>
             </a:r>
           </a:p>
           <a:p>
             <a:pPr algn="l"/>
             <a:r>
-              <a:rPr lang="en-US" sz="3200" dirty="0" err="1"/>
+              <a:rPr lang="en-US" sz="3000" dirty="0" err="1"/>
               <a:t>Thể</a:t>
             </a:r>
             <a:r>
-              <a:rPr lang="en-US" sz="3200" dirty="0"/>
-              <a:t> </a:t>
-            </a:r>
-            <a:r>
-              <a:rPr lang="en-US" sz="3200" dirty="0" err="1"/>
+              <a:rPr lang="en-US" sz="3000" dirty="0"/>
+              <a:t> </a:t>
+            </a:r>
+            <a:r>
+              <a:rPr lang="en-US" sz="3000" dirty="0" err="1"/>
               <a:t>loại</a:t>
             </a:r>
             <a:r>
-              <a:rPr lang="en-US" sz="3200" dirty="0"/>
+              <a:rPr lang="en-US" sz="3000" dirty="0"/>
               <a:t>: Rogue-like</a:t>
             </a:r>
           </a:p>
@@ -7193,7 +7193,7 @@
         </p:nvSpPr>
         <p:spPr>
           <a:xfrm>
-            <a:off x="827314" y="1515291"/>
+            <a:off x="827314" y="2117589"/>
             <a:ext cx="10537371" cy="967060"/>
           </a:xfrm>
         </p:spPr>
@@ -7294,7 +7294,7 @@
         </p:nvSpPr>
         <p:spPr>
           <a:xfrm>
-            <a:off x="1524000" y="2601119"/>
+            <a:off x="1523999" y="3597815"/>
             <a:ext cx="9144000" cy="1655762"/>
           </a:xfrm>
         </p:spPr>

--- a/Thuyết trình bảo vệ đồ án cuối khóa.pptx
+++ b/Thuyết trình bảo vệ đồ án cuối khóa.pptx
@@ -6209,8 +6209,12 @@
               </a:spcBef>
             </a:pPr>
             <a:r>
-              <a:rPr lang="en-US" sz="2400" dirty="0"/>
-              <a:t>Animation, blend tree, IK bones. </a:t>
+              <a:rPr lang="en-US" sz="2400"/>
+              <a:t>Animation retarget, </a:t>
+            </a:r>
+            <a:r>
+              <a:rPr lang="en-US" sz="2400" dirty="0"/>
+              <a:t>blend tree, IK bones. </a:t>
             </a:r>
           </a:p>
           <a:p>
